--- a/briefings/project-overview-5min.pptx
+++ b/briefings/project-overview-5min.pptx
@@ -728,7 +728,7 @@
           <a:lstStyle/>
           <a:p>
             <a:r>
-              <a:t>Four takeaways. Audit at the fine-tuning checkpoint, because that is where most of the snap-answer profile appears. Say whether you measured snap answers or reasoning, because the two can disagree. Check that the subject is paying attention before trusting any estimate. And read reasoning traces knowing each family has its own habits. Next, we pay the model while it reasons, and then use the same machinery to ask whether AI agents favor their own kind. Thank you.</a:t>
+              <a:t>Four takeaways. Audit at the fine-tuning checkpoint, because that is where most of the snap-answer profile appears. Say whether you measured snap answers or reasoning, because the two can disagree. Check that the subject is paying attention before trusting any estimate. And read reasoning traces knowing each family has its own habits. Next, we pay the model while it reasons, use the same machinery to ask whether AI agents favor their own kind, and then ask whether the risk habits we measured show up in the advice a model gives a commander or an official, with the same numbers as our bets. Thank you.</a:t>
             </a:r>
           </a:p>
         </p:txBody>
@@ -3923,7 +3923,7 @@
                 <a:ea typeface="Helvetica Neue" pitchFamily="34" charset="-122"/>
                 <a:cs typeface="Helvetica Neue" pitchFamily="34" charset="-120"/>
               </a:rPr>
-              <a:t>Pay the model while it reasons, where it can already compute. Then ask whether models cooperate more with a counterpart from their own family.</a:t>
+              <a:t>Pay the model while it reasons. Ask whether models favor their own family, and whether these risk habits carry into the advice they give commanders and officials.</a:t>
             </a:r>
             <a:endParaRPr lang="en-US" sz="1600" dirty="0"/>
           </a:p>
